--- a/Reporte.pptx
+++ b/Reporte.pptx
@@ -147,12 +147,12 @@
   <p:extLst>
     <p:ext uri="{EFAFB233-063F-42B5-8137-9DF3F51BA10A}">
       <p15:sldGuideLst xmlns:p15="http://schemas.microsoft.com/office/powerpoint/2012/main">
-        <p15:guide id="1" orient="horz" pos="2222" userDrawn="1">
+        <p15:guide id="1" orient="horz" pos="2199" userDrawn="1">
           <p15:clr>
             <a:srgbClr val="A4A3A4"/>
           </p15:clr>
         </p15:guide>
-        <p15:guide id="2" pos="2924" userDrawn="1">
+        <p15:guide id="2" pos="2887" userDrawn="1">
           <p15:clr>
             <a:srgbClr val="A4A3A4"/>
           </p15:clr>
@@ -3190,47 +3190,14 @@
       </p:sp>
       <p:sp>
         <p:nvSpPr>
-          <p:cNvPr id="6" name="Cuadro de texto 5"/>
-          <p:cNvSpPr txBox="1"/>
-          <p:nvPr/>
-        </p:nvSpPr>
-        <p:spPr>
-          <a:xfrm>
-            <a:off x="2286000" y="3168015"/>
-            <a:ext cx="4572000" cy="521970"/>
-          </a:xfrm>
-          <a:prstGeom prst="rect">
-            <a:avLst/>
-          </a:prstGeom>
-          <a:noFill/>
-        </p:spPr>
-        <p:txBody>
-          <a:bodyPr wrap="square" rtlCol="0" anchor="t">
-            <a:spAutoFit/>
-          </a:bodyPr>
-          <a:p>
-            <a:r>
-              <a:rPr lang="es-MX" altLang="en-US" sz="2800" dirty="0">
-                <a:sym typeface="+mn-ea"/>
-              </a:rPr>
-              <a:t> </a:t>
-            </a:r>
-            <a:endParaRPr lang="es-MX" altLang="en-US" sz="2800" dirty="0">
-              <a:sym typeface="+mn-ea"/>
-            </a:endParaRPr>
-          </a:p>
-        </p:txBody>
-      </p:sp>
-      <p:sp>
-        <p:nvSpPr>
           <p:cNvPr id="7" name="CuadroTexto 2"/>
           <p:cNvSpPr txBox="1"/>
           <p:nvPr/>
         </p:nvSpPr>
         <p:spPr>
           <a:xfrm>
-            <a:off x="1763564" y="476672"/>
-            <a:ext cx="5616575" cy="1296144"/>
+            <a:off x="1763395" y="476885"/>
+            <a:ext cx="5616575" cy="644525"/>
           </a:xfrm>
           <a:prstGeom prst="rect">
             <a:avLst/>
@@ -3245,10 +3212,18 @@
           <a:p>
             <a:pPr algn="ctr"/>
             <a:r>
-              <a:rPr lang="es-MX" altLang="en-US" sz="2800" dirty="0"/>
+              <a:rPr lang="es-MX" altLang="en-US" sz="2800" dirty="0">
+                <a:solidFill>
+                  <a:schemeClr val="tx2"/>
+                </a:solidFill>
+              </a:rPr>
               <a:t>REPORTE DE SERVICIO</a:t>
             </a:r>
-            <a:endParaRPr lang="es-MX" altLang="en-US" sz="2800" dirty="0"/>
+            <a:endParaRPr lang="es-MX" altLang="en-US" sz="2800" dirty="0">
+              <a:solidFill>
+                <a:schemeClr val="tx2"/>
+              </a:solidFill>
+            </a:endParaRPr>
           </a:p>
           <a:p>
             <a:pPr algn="ctr"/>
@@ -3256,12 +3231,12 @@
           </a:p>
           <a:p>
             <a:pPr algn="ctr"/>
-            <a:endParaRPr lang="es-MX" altLang="en-US" sz="2800" dirty="0"/>
-          </a:p>
-          <a:p>
-            <a:pPr algn="ctr"/>
             <a:r>
-              <a:rPr lang="es-MX" altLang="en-US" sz="6000" dirty="0"/>
+              <a:rPr lang="es-MX" altLang="en-US" sz="6000" dirty="0">
+                <a:solidFill>
+                  <a:schemeClr val="tx2"/>
+                </a:solidFill>
+              </a:rPr>
               <a:t>“Empresa”</a:t>
             </a:r>
             <a:r>
@@ -3284,6 +3259,162 @@
           </a:p>
         </p:txBody>
       </p:sp>
+      <p:sp>
+        <p:nvSpPr>
+          <p:cNvPr id="3" name="Cuadro de texto 2"/>
+          <p:cNvSpPr txBox="1"/>
+          <p:nvPr/>
+        </p:nvSpPr>
+        <p:spPr>
+          <a:xfrm>
+            <a:off x="3060065" y="3168015"/>
+            <a:ext cx="3048000" cy="645160"/>
+          </a:xfrm>
+          <a:prstGeom prst="rect">
+            <a:avLst/>
+          </a:prstGeom>
+          <a:noFill/>
+        </p:spPr>
+        <p:txBody>
+          <a:bodyPr wrap="square" rtlCol="0">
+            <a:spAutoFit/>
+          </a:bodyPr>
+          <a:p>
+            <a:pPr algn="ctr"/>
+            <a:r>
+              <a:rPr lang="es-MX" altLang="en-US"/>
+              <a:t>By.</a:t>
+            </a:r>
+            <a:endParaRPr lang="es-MX" altLang="en-US"/>
+          </a:p>
+          <a:p>
+            <a:pPr algn="ctr"/>
+            <a:r>
+              <a:rPr lang="es-MX" altLang="en-US"/>
+              <a:t>TECNICO</a:t>
+            </a:r>
+            <a:endParaRPr lang="es-MX" altLang="en-US"/>
+          </a:p>
+        </p:txBody>
+      </p:sp>
+      <p:pic>
+        <p:nvPicPr>
+          <p:cNvPr id="4" name="Imagen 3"/>
+          <p:cNvPicPr/>
+          <p:nvPr/>
+        </p:nvPicPr>
+        <p:blipFill>
+          <a:blip r:embed="rId1">
+            <a:biLevel thresh="50000"/>
+          </a:blip>
+          <a:stretch>
+            <a:fillRect/>
+          </a:stretch>
+        </p:blipFill>
+        <p:spPr>
+          <a:xfrm>
+            <a:off x="69215" y="4700270"/>
+            <a:ext cx="1828800" cy="826770"/>
+          </a:xfrm>
+          <a:prstGeom prst="rect">
+            <a:avLst/>
+          </a:prstGeom>
+        </p:spPr>
+      </p:pic>
+      <p:pic>
+        <p:nvPicPr>
+          <p:cNvPr id="13" name="Imagen 12"/>
+          <p:cNvPicPr/>
+          <p:nvPr/>
+        </p:nvPicPr>
+        <p:blipFill>
+          <a:blip r:embed="rId2">
+            <a:biLevel thresh="50000"/>
+          </a:blip>
+          <a:stretch>
+            <a:fillRect/>
+          </a:stretch>
+        </p:blipFill>
+        <p:spPr>
+          <a:xfrm>
+            <a:off x="1888490" y="4681538"/>
+            <a:ext cx="1828800" cy="864235"/>
+          </a:xfrm>
+          <a:prstGeom prst="rect">
+            <a:avLst/>
+          </a:prstGeom>
+        </p:spPr>
+      </p:pic>
+      <p:pic>
+        <p:nvPicPr>
+          <p:cNvPr id="16" name="Imagen 15"/>
+          <p:cNvPicPr/>
+          <p:nvPr/>
+        </p:nvPicPr>
+        <p:blipFill>
+          <a:blip r:embed="rId3">
+            <a:biLevel thresh="50000"/>
+          </a:blip>
+          <a:stretch>
+            <a:fillRect/>
+          </a:stretch>
+        </p:blipFill>
+        <p:spPr>
+          <a:xfrm>
+            <a:off x="3564255" y="4793615"/>
+            <a:ext cx="1828800" cy="640080"/>
+          </a:xfrm>
+          <a:prstGeom prst="rect">
+            <a:avLst/>
+          </a:prstGeom>
+        </p:spPr>
+      </p:pic>
+      <p:pic>
+        <p:nvPicPr>
+          <p:cNvPr id="21" name="Imagen 20"/>
+          <p:cNvPicPr/>
+          <p:nvPr/>
+        </p:nvPicPr>
+        <p:blipFill>
+          <a:blip r:embed="rId4">
+            <a:biLevel thresh="50000"/>
+          </a:blip>
+          <a:stretch>
+            <a:fillRect/>
+          </a:stretch>
+        </p:blipFill>
+        <p:spPr>
+          <a:xfrm>
+            <a:off x="5455285" y="4793615"/>
+            <a:ext cx="1828800" cy="640080"/>
+          </a:xfrm>
+          <a:prstGeom prst="rect">
+            <a:avLst/>
+          </a:prstGeom>
+        </p:spPr>
+      </p:pic>
+      <p:pic>
+        <p:nvPicPr>
+          <p:cNvPr id="23" name="Imagen 22"/>
+          <p:cNvPicPr/>
+          <p:nvPr/>
+        </p:nvPicPr>
+        <p:blipFill>
+          <a:blip r:embed="rId5"/>
+          <a:stretch>
+            <a:fillRect/>
+          </a:stretch>
+        </p:blipFill>
+        <p:spPr>
+          <a:xfrm>
+            <a:off x="7274560" y="4645660"/>
+            <a:ext cx="1828800" cy="935990"/>
+          </a:xfrm>
+          <a:prstGeom prst="rect">
+            <a:avLst/>
+          </a:prstGeom>
+        </p:spPr>
+      </p:pic>
     </p:spTree>
   </p:cSld>
   <p:clrMapOvr>

--- a/Reporte.pptx
+++ b/Reporte.pptx
@@ -3156,8 +3156,8 @@
         </p:nvSpPr>
         <p:spPr>
           <a:xfrm>
-            <a:off x="251520" y="6237312"/>
-            <a:ext cx="2646294" cy="321945"/>
+            <a:off x="6588125" y="44450"/>
+            <a:ext cx="2646045" cy="357505"/>
           </a:xfrm>
           <a:prstGeom prst="rect">
             <a:avLst/>
@@ -3166,22 +3166,22 @@
         </p:spPr>
         <p:txBody>
           <a:bodyPr wrap="square" rtlCol="0">
-            <a:spAutoFit/>
+            <a:noAutofit/>
           </a:bodyPr>
           <a:lstStyle/>
           <a:p>
             <a:r>
-              <a:rPr lang="es-MX" sz="1500" b="1" dirty="0">
+              <a:rPr lang="es-MX" altLang="en-US" sz="1500" b="1" dirty="0">
                 <a:solidFill>
-                  <a:schemeClr val="bg1"/>
+                  <a:schemeClr val="tx1"/>
                 </a:solidFill>
                 <a:latin typeface="Century Gothic" panose="020B0502020202020204" pitchFamily="34" charset="0"/>
               </a:rPr>
-              <a:t>Date: 30-09-2026</a:t>
+              <a:t>Fecha: {FECHA}</a:t>
             </a:r>
-            <a:endParaRPr lang="en-US" sz="1500" b="1" dirty="0">
+            <a:endParaRPr lang="es-MX" altLang="en-US" sz="1500" b="1" dirty="0">
               <a:solidFill>
-                <a:schemeClr val="bg1"/>
+                <a:schemeClr val="tx1"/>
               </a:solidFill>
               <a:latin typeface="Century Gothic" panose="020B0502020202020204" pitchFamily="34" charset="0"/>
             </a:endParaRPr>
@@ -3217,7 +3217,7 @@
                   <a:schemeClr val="tx2"/>
                 </a:solidFill>
               </a:rPr>
-              <a:t>REPORTE DE SERVICIO</a:t>
+              <a:t>REPORTE DE SERVICIO    </a:t>
             </a:r>
             <a:endParaRPr lang="es-MX" altLang="en-US" sz="2800" dirty="0">
               <a:solidFill>
@@ -3227,6 +3227,23 @@
           </a:p>
           <a:p>
             <a:pPr algn="ctr"/>
+            <a:endParaRPr lang="es-MX" altLang="en-US" sz="2800" dirty="0">
+              <a:solidFill>
+                <a:schemeClr val="tx2"/>
+              </a:solidFill>
+            </a:endParaRPr>
+          </a:p>
+          <a:p>
+            <a:pPr algn="ctr"/>
+            <a:r>
+              <a:rPr lang="es-MX" altLang="en-US" sz="2800" dirty="0">
+                <a:solidFill>
+                  <a:schemeClr val="tx2"/>
+                </a:solidFill>
+                <a:sym typeface="+mn-ea"/>
+              </a:rPr>
+              <a:t>Empresa:</a:t>
+            </a:r>
             <a:endParaRPr lang="es-MX" altLang="en-US" sz="2800" dirty="0"/>
           </a:p>
           <a:p>
@@ -3237,7 +3254,7 @@
                   <a:schemeClr val="tx2"/>
                 </a:solidFill>
               </a:rPr>
-              <a:t>“Empresa”</a:t>
+              <a:t>{Empresa}</a:t>
             </a:r>
             <a:r>
               <a:rPr lang="es-MX" altLang="en-US" sz="8000" dirty="0"/>
@@ -3268,7 +3285,7 @@
         <p:spPr>
           <a:xfrm>
             <a:off x="3060065" y="3168015"/>
-            <a:ext cx="3048000" cy="645160"/>
+            <a:ext cx="3048000" cy="368300"/>
           </a:xfrm>
           <a:prstGeom prst="rect">
             <a:avLst/>
@@ -3283,15 +3300,7 @@
             <a:pPr algn="ctr"/>
             <a:r>
               <a:rPr lang="es-MX" altLang="en-US"/>
-              <a:t>By.</a:t>
-            </a:r>
-            <a:endParaRPr lang="es-MX" altLang="en-US"/>
-          </a:p>
-          <a:p>
-            <a:pPr algn="ctr"/>
-            <a:r>
-              <a:rPr lang="es-MX" altLang="en-US"/>
-              <a:t>TECNICO</a:t>
+              <a:t>By.{TECNICO}</a:t>
             </a:r>
             <a:endParaRPr lang="es-MX" altLang="en-US"/>
           </a:p>
@@ -3433,6 +3442,42 @@
         <p:nvPr/>
       </p:nvGrpSpPr>
       <p:grpSpPr/>
+      <p:sp>
+        <p:nvSpPr>
+          <p:cNvPr id="2" name="Cuadro de texto 1"/>
+          <p:cNvSpPr txBox="1"/>
+          <p:nvPr/>
+        </p:nvSpPr>
+        <p:spPr>
+          <a:xfrm>
+            <a:off x="170815" y="534035"/>
+            <a:ext cx="8874760" cy="5173345"/>
+          </a:xfrm>
+          <a:prstGeom prst="rect">
+            <a:avLst/>
+          </a:prstGeom>
+          <a:noFill/>
+        </p:spPr>
+        <p:txBody>
+          <a:bodyPr wrap="square" rtlCol="0">
+            <a:noAutofit/>
+          </a:bodyPr>
+          <a:p>
+            <a:r>
+              <a:rPr lang="es-MX" altLang="en-US"/>
+              <a:t>Tabajo realizado:</a:t>
+            </a:r>
+            <a:endParaRPr lang="es-MX" altLang="en-US"/>
+          </a:p>
+          <a:p>
+            <a:r>
+              <a:rPr lang="es-MX" altLang="en-US"/>
+              <a:t>{TRABAJO}</a:t>
+            </a:r>
+            <a:endParaRPr lang="es-MX" altLang="en-US"/>
+          </a:p>
+        </p:txBody>
+      </p:sp>
     </p:spTree>
   </p:cSld>
   <p:clrMapOvr>
